--- a/presentations/Tenneco_FollowUp2_RoboticWelding_Diego_de_Leon.pptx
+++ b/presentations/Tenneco_FollowUp2_RoboticWelding_Diego_de_Leon.pptx
@@ -819,17 +819,27 @@
           <a:lstStyle/>
           <a:p>
             <a:r>
-              <a:t>• Problem: parallelism on DPF parts that were already released.</a:t>
-            </a:r>
-          </a:p>
-          <a:p>
-            <a:r>
-              <a:t>• Action: full re-measurement with a metrology expert, 8 DPF remade.</a:t>
-            </a:r>
-          </a:p>
-          <a:p>
-            <a:r>
-              <a:t>• Status: DOC and DPF 95%, only documents; SCR started, 14 PVs released.</a:t>
+              <a:t>• Problem: parallelism on parts that were already released.</a:t>
+            </a:r>
+          </a:p>
+          <a:p>
+            <a:r>
+              <a:t>• Action: full re-measurement with a metrology expert, 25 PVs corrected.</a:t>
+            </a:r>
+          </a:p>
+          <a:p>
+            <a:r>
+              <a:t>• DOC and DPF: PPAP in November, production in January.</a:t>
+            </a:r>
+          </a:p>
+          <a:p>
+            <a:r>
+              <a:t>• SCR: endout 7 parts; sideout stopped, no measurement assured yet.</a:t>
+            </a:r>
+          </a:p>
+          <a:p>
+            <a:r>
+              <a:t>• My time: 70% industrialization, 30% cells (it was 60/40).</a:t>
             </a:r>
           </a:p>
         </p:txBody>
@@ -909,7 +919,12 @@
           </a:p>
           <a:p>
             <a:r>
-              <a:t>• 8 DPF remade after the metrology check; 14 SCR PVs already released.</a:t>
+              <a:t>• 25 PVs corrected after the metrology check.</a:t>
+            </a:r>
+          </a:p>
+          <a:p>
+            <a:r>
+              <a:t>• SCR: 7 endout parts built; sideout stopped by metrology.</a:t>
             </a:r>
           </a:p>
         </p:txBody>
@@ -1539,7 +1554,12 @@
           </a:p>
           <a:p>
             <a:r>
-              <a:t>• DOC and DPF at 95%, PPAP in the first week of January.</a:t>
+              <a:t>• DOC and DPF at 95%: PPAP in November, production in January.</a:t>
+            </a:r>
+          </a:p>
+          <a:p>
+            <a:r>
+              <a:t>• SCR: PPAP in January; sideout is on hold for metrology.</a:t>
             </a:r>
           </a:p>
         </p:txBody>
@@ -15755,7 +15775,7 @@
                 </a:solidFill>
                 <a:latin typeface="Segoe UI"/>
               </a:rPr>
-              <a:t>Industrialization: DOC and DPF at 95%, SCR started</a:t>
+              <a:t>Industrialization: DOC and DPF go to PPAP in November</a:t>
             </a:r>
           </a:p>
         </p:txBody>
@@ -15904,7 +15924,7 @@
                 </a:solidFill>
                 <a:latin typeface="Segoe UI"/>
               </a:rPr>
-              <a:t>DPF parts already released failed metrology: parallelism out of tolerance.</a:t>
+              <a:t>DOC and DPF parts already released failed metrology. The main failure: parallelism.</a:t>
             </a:r>
           </a:p>
         </p:txBody>
@@ -15991,7 +16011,7 @@
                 </a:solidFill>
                 <a:latin typeface="Segoe UI"/>
               </a:rPr>
-              <a:t>A metrology expert measured everything again, and we remade 8 DPF parts: 4 short and 4 long canning.</a:t>
+              <a:t>A metrology expert measured everything again, and we corrected 25 PV parts: 18 DOC, 3 long and 4 short canning.</a:t>
             </a:r>
           </a:p>
         </p:txBody>
@@ -16078,7 +16098,7 @@
                 </a:solidFill>
                 <a:latin typeface="Segoe UI"/>
               </a:rPr>
-              <a:t>DOC and DPF at 95%, only documentation left. SCR started in October: 7 PV parts of each of two models, released.</a:t>
+              <a:t>DOC and DPF at 95%: PPAP in November, production in January. SCR: 7 endout parts built, sideout on hold, PPAP in January.</a:t>
             </a:r>
           </a:p>
         </p:txBody>
@@ -16205,7 +16225,7 @@
                 </a:solidFill>
                 <a:latin typeface="Segoe UI"/>
               </a:rPr>
-              <a:t>DPF parts or the metrology check</a:t>
+              <a:t>DOC and DPF parts, or the metrology check</a:t>
             </a:r>
           </a:p>
         </p:txBody>
@@ -16247,45 +16267,14 @@
       </p:sp>
       <p:sp>
         <p:nvSpPr>
-          <p:cNvPr id="15" name="Rectangle 14"/>
-          <p:cNvSpPr/>
-          <p:nvPr/>
-        </p:nvSpPr>
-        <p:spPr>
-          <a:xfrm>
-            <a:off x="6519672" y="3776472"/>
-            <a:ext cx="5276088" cy="1572768"/>
-          </a:xfrm>
-          <a:prstGeom prst="rect">
-            <a:avLst/>
-          </a:prstGeom>
-          <a:noFill/>
-          <a:ln w="9525">
-            <a:solidFill>
-              <a:srgbClr val="6B7A83">
-                <a:alpha val="35000"/>
-              </a:srgbClr>
-            </a:solidFill>
-          </a:ln>
-        </p:spPr>
-        <p:txBody>
-          <a:bodyPr rtlCol="0" anchor="ctr" wrap="square" lIns="0" rIns="0" tIns="0" bIns="0"/>
-          <a:lstStyle/>
-          <a:p>
-            <a:pPr algn="ctr"/>
-          </a:p>
-        </p:txBody>
-      </p:sp>
-      <p:sp>
-        <p:nvSpPr>
-          <p:cNvPr id="16" name="TextBox 15"/>
+          <p:cNvPr id="15" name="TextBox 14"/>
           <p:cNvSpPr txBox="1"/>
           <p:nvPr/>
         </p:nvSpPr>
         <p:spPr>
           <a:xfrm>
-            <a:off x="6382512" y="4306824"/>
-            <a:ext cx="5550408" cy="548640"/>
+            <a:off x="6720840" y="3822191"/>
+            <a:ext cx="4937760" cy="274320"/>
           </a:xfrm>
           <a:prstGeom prst="rect">
             <a:avLst/>
@@ -16298,7 +16287,7 @@
           </a:bodyPr>
           <a:lstStyle/>
           <a:p>
-            <a:pPr algn="ctr">
+            <a:pPr algn="l">
               <a:spcBef>
                 <a:spcPts val="0"/>
               </a:spcBef>
@@ -16307,32 +16296,199 @@
               </a:spcAft>
             </a:pPr>
             <a:r>
-              <a:rPr sz="1100" b="1">
+              <a:rPr sz="1600" b="1">
                 <a:solidFill>
                   <a:srgbClr val="0033A0"/>
                 </a:solidFill>
                 <a:latin typeface="Segoe UI"/>
               </a:rPr>
-              <a:t>PHOTO</a:t>
-            </a:r>
-          </a:p>
-          <a:p>
-            <a:pPr algn="ctr">
+              <a:t>MY TIME THIS MONTH</a:t>
+            </a:r>
+          </a:p>
+        </p:txBody>
+      </p:sp>
+      <p:sp>
+        <p:nvSpPr>
+          <p:cNvPr id="16" name="TextBox 15"/>
+          <p:cNvSpPr txBox="1"/>
+          <p:nvPr/>
+        </p:nvSpPr>
+        <p:spPr>
+          <a:xfrm>
+            <a:off x="6720840" y="4206240"/>
+            <a:ext cx="1371600" cy="548640"/>
+          </a:xfrm>
+          <a:prstGeom prst="rect">
+            <a:avLst/>
+          </a:prstGeom>
+          <a:noFill/>
+        </p:spPr>
+        <p:txBody>
+          <a:bodyPr wrap="square" lIns="0" rIns="0" tIns="0" bIns="0" anchor="t">
+            <a:spAutoFit/>
+          </a:bodyPr>
+          <a:lstStyle/>
+          <a:p>
+            <a:pPr algn="l">
               <a:spcBef>
-                <a:spcPts val="200"/>
+                <a:spcPts val="0"/>
               </a:spcBef>
               <a:spcAft>
                 <a:spcPts val="0"/>
               </a:spcAft>
             </a:pPr>
             <a:r>
-              <a:rPr sz="1200" b="0">
-                <a:solidFill>
-                  <a:srgbClr val="6B7A83"/>
+              <a:rPr sz="3000" b="1">
+                <a:solidFill>
+                  <a:srgbClr val="0033A0"/>
                 </a:solidFill>
                 <a:latin typeface="Segoe UI"/>
               </a:rPr>
-              <a:t>The SCR model</a:t>
+              <a:t>70%</a:t>
+            </a:r>
+          </a:p>
+        </p:txBody>
+      </p:sp>
+      <p:sp>
+        <p:nvSpPr>
+          <p:cNvPr id="17" name="TextBox 16"/>
+          <p:cNvSpPr txBox="1"/>
+          <p:nvPr/>
+        </p:nvSpPr>
+        <p:spPr>
+          <a:xfrm>
+            <a:off x="8092440" y="4297680"/>
+            <a:ext cx="3566160" cy="411480"/>
+          </a:xfrm>
+          <a:prstGeom prst="rect">
+            <a:avLst/>
+          </a:prstGeom>
+          <a:noFill/>
+        </p:spPr>
+        <p:txBody>
+          <a:bodyPr wrap="square" lIns="0" rIns="0" tIns="0" bIns="0" anchor="t">
+            <a:spAutoFit/>
+          </a:bodyPr>
+          <a:lstStyle/>
+          <a:p>
+            <a:pPr algn="l">
+              <a:spcBef>
+                <a:spcPts val="0"/>
+              </a:spcBef>
+              <a:spcAft>
+                <a:spcPts val="0"/>
+              </a:spcAft>
+            </a:pPr>
+            <a:r>
+              <a:rPr sz="1300" b="1">
+                <a:solidFill>
+                  <a:srgbClr val="051C2C"/>
+                </a:solidFill>
+                <a:latin typeface="Segoe UI"/>
+              </a:rPr>
+              <a:t>industrialization, with Engineering</a:t>
+            </a:r>
+          </a:p>
+        </p:txBody>
+      </p:sp>
+      <p:sp>
+        <p:nvSpPr>
+          <p:cNvPr id="18" name="Rectangle 17"/>
+          <p:cNvSpPr/>
+          <p:nvPr/>
+        </p:nvSpPr>
+        <p:spPr>
+          <a:xfrm>
+            <a:off x="6720840" y="4846320"/>
+            <a:ext cx="4892040" cy="128016"/>
+          </a:xfrm>
+          <a:prstGeom prst="rect">
+            <a:avLst/>
+          </a:prstGeom>
+          <a:solidFill>
+            <a:srgbClr val="051C2C">
+              <a:alpha val="15000"/>
+            </a:srgbClr>
+          </a:solidFill>
+          <a:ln>
+            <a:noFill/>
+          </a:ln>
+        </p:spPr>
+        <p:txBody>
+          <a:bodyPr rtlCol="0" anchor="ctr" wrap="square" lIns="0" rIns="0" tIns="0" bIns="0"/>
+          <a:lstStyle/>
+          <a:p>
+            <a:pPr algn="ctr"/>
+          </a:p>
+        </p:txBody>
+      </p:sp>
+      <p:sp>
+        <p:nvSpPr>
+          <p:cNvPr id="19" name="Rectangle 18"/>
+          <p:cNvSpPr/>
+          <p:nvPr/>
+        </p:nvSpPr>
+        <p:spPr>
+          <a:xfrm>
+            <a:off x="6720840" y="4846320"/>
+            <a:ext cx="3424427" cy="128016"/>
+          </a:xfrm>
+          <a:prstGeom prst="rect">
+            <a:avLst/>
+          </a:prstGeom>
+          <a:solidFill>
+            <a:srgbClr val="0033A0"/>
+          </a:solidFill>
+          <a:ln>
+            <a:noFill/>
+          </a:ln>
+        </p:spPr>
+        <p:txBody>
+          <a:bodyPr rtlCol="0" anchor="ctr" wrap="square" lIns="0" rIns="0" tIns="0" bIns="0"/>
+          <a:lstStyle/>
+          <a:p>
+            <a:pPr algn="ctr"/>
+          </a:p>
+        </p:txBody>
+      </p:sp>
+      <p:sp>
+        <p:nvSpPr>
+          <p:cNvPr id="20" name="TextBox 19"/>
+          <p:cNvSpPr txBox="1"/>
+          <p:nvPr/>
+        </p:nvSpPr>
+        <p:spPr>
+          <a:xfrm>
+            <a:off x="6720840" y="5074920"/>
+            <a:ext cx="4937760" cy="274320"/>
+          </a:xfrm>
+          <a:prstGeom prst="rect">
+            <a:avLst/>
+          </a:prstGeom>
+          <a:noFill/>
+        </p:spPr>
+        <p:txBody>
+          <a:bodyPr wrap="square" lIns="0" rIns="0" tIns="0" bIns="0" anchor="t">
+            <a:spAutoFit/>
+          </a:bodyPr>
+          <a:lstStyle/>
+          <a:p>
+            <a:pPr algn="l">
+              <a:spcBef>
+                <a:spcPts val="0"/>
+              </a:spcBef>
+              <a:spcAft>
+                <a:spcPts val="0"/>
+              </a:spcAft>
+            </a:pPr>
+            <a:r>
+              <a:rPr sz="1200" b="0">
+                <a:solidFill>
+                  <a:srgbClr val="6B7A83"/>
+                </a:solidFill>
+                <a:latin typeface="Segoe UI"/>
+              </a:rPr>
+              <a:t>30%  support at the robotic cells</a:t>
             </a:r>
           </a:p>
         </p:txBody>
@@ -16816,7 +16972,7 @@
                 </a:solidFill>
                 <a:latin typeface="Segoe UI"/>
               </a:rPr>
-              <a:t>Only documentation left. PPAP in the first week of January.</a:t>
+              <a:t>Only documentation left. PPAP in November, production in January.</a:t>
             </a:r>
           </a:p>
         </p:txBody>
@@ -16984,7 +17140,7 @@
                 </a:solidFill>
                 <a:latin typeface="Segoe UI"/>
               </a:rPr>
-              <a:t>8</a:t>
+              <a:t>25</a:t>
             </a:r>
           </a:p>
         </p:txBody>
@@ -17026,7 +17182,7 @@
                 </a:solidFill>
                 <a:latin typeface="Segoe UI"/>
               </a:rPr>
-              <a:t>DPF parts remade</a:t>
+              <a:t>PV parts corrected</a:t>
             </a:r>
           </a:p>
         </p:txBody>
@@ -17068,7 +17224,7 @@
                 </a:solidFill>
                 <a:latin typeface="Segoe UI"/>
               </a:rPr>
-              <a:t>after re-measuring parallelism</a:t>
+              <a:t>18 DOC, 3 DPF long, 4 DPF short</a:t>
             </a:r>
           </a:p>
         </p:txBody>
@@ -17110,7 +17266,7 @@
                 </a:solidFill>
                 <a:latin typeface="Segoe UI"/>
               </a:rPr>
-              <a:t>14</a:t>
+              <a:t>7</a:t>
             </a:r>
           </a:p>
         </p:txBody>
@@ -17152,7 +17308,7 @@
                 </a:solidFill>
                 <a:latin typeface="Segoe UI"/>
               </a:rPr>
-              <a:t>SCR PV parts</a:t>
+              <a:t>SCR endout parts</a:t>
             </a:r>
           </a:p>
         </p:txBody>
@@ -17194,7 +17350,7 @@
                 </a:solidFill>
                 <a:latin typeface="Segoe UI"/>
               </a:rPr>
-              <a:t>two models, 7 each, released</a:t>
+              <a:t>sideout on hold for metrology</a:t>
             </a:r>
           </a:p>
         </p:txBody>
@@ -18020,7 +18176,7 @@
                 </a:solidFill>
                 <a:latin typeface="Segoe UI"/>
               </a:rPr>
-              <a:t>DOC and DPF PPAP</a:t>
+              <a:t>PPAP: DOC and DPF in November, SCR in January</a:t>
             </a:r>
           </a:p>
         </p:txBody>
@@ -18062,7 +18218,7 @@
                 </a:solidFill>
                 <a:latin typeface="Segoe UI"/>
               </a:rPr>
-              <a:t>First week of January</a:t>
+              <a:t>DOC and DPF production starts in January</a:t>
             </a:r>
           </a:p>
         </p:txBody>
@@ -18668,7 +18824,7 @@
                 </a:solidFill>
                 <a:latin typeface="Segoe UI"/>
               </a:rPr>
-              <a:t>DOC and DPF at 95%, and SCR started with 14 PV parts released.</a:t>
+              <a:t>DOC and DPF at 95%, with 25 PV parts corrected after metrology.</a:t>
             </a:r>
           </a:p>
         </p:txBody>
@@ -18836,7 +18992,7 @@
                 </a:solidFill>
                 <a:latin typeface="Segoe UI"/>
               </a:rPr>
-              <a:t>Support the DOC and DPF PPAP in the first week of January.</a:t>
+              <a:t>Support the DOC and DPF PPAP in November, and SCR’s in January.</a:t>
             </a:r>
           </a:p>
         </p:txBody>
@@ -24918,7 +25074,7 @@
                 </a:solidFill>
                 <a:latin typeface="Segoe UI"/>
               </a:rPr>
-              <a:t>PVs in 4M, PPAP in week 1</a:t>
+              <a:t>PPAP in November, production in January</a:t>
             </a:r>
           </a:p>
         </p:txBody>
@@ -24932,7 +25088,7 @@
         <p:spPr>
           <a:xfrm>
             <a:off x="7676586" y="4078224"/>
-            <a:ext cx="3699741" cy="201168"/>
+            <a:ext cx="4073453" cy="201168"/>
           </a:xfrm>
           <a:prstGeom prst="rect">
             <a:avLst/>
@@ -24989,7 +25145,7 @@
         </p:nvSpPr>
         <p:spPr>
           <a:xfrm>
-            <a:off x="11462600" y="4078224"/>
+            <a:off x="8099198" y="4078224"/>
             <a:ext cx="201168" cy="201168"/>
           </a:xfrm>
           <a:prstGeom prst="diamond">
@@ -25018,8 +25174,8 @@
         </p:nvSpPr>
         <p:spPr>
           <a:xfrm>
-            <a:off x="10603064" y="4078224"/>
-            <a:ext cx="777240" cy="201168"/>
+            <a:off x="8355230" y="4078224"/>
+            <a:ext cx="914400" cy="201168"/>
           </a:xfrm>
           <a:prstGeom prst="rect">
             <a:avLst/>
@@ -25032,7 +25188,7 @@
           </a:bodyPr>
           <a:lstStyle/>
           <a:p>
-            <a:pPr algn="r">
+            <a:pPr algn="l">
               <a:spcBef>
                 <a:spcPts val="0"/>
               </a:spcBef>
@@ -25054,7 +25210,78 @@
       </p:sp>
       <p:sp>
         <p:nvSpPr>
-          <p:cNvPr id="70" name="Rectangle 69"/>
+          <p:cNvPr id="70" name="Diamond 69"/>
+          <p:cNvSpPr/>
+          <p:nvPr/>
+        </p:nvSpPr>
+        <p:spPr>
+          <a:xfrm>
+            <a:off x="11462600" y="4078224"/>
+            <a:ext cx="201168" cy="201168"/>
+          </a:xfrm>
+          <a:prstGeom prst="diamond">
+            <a:avLst/>
+          </a:prstGeom>
+          <a:solidFill>
+            <a:srgbClr val="FFFFFF"/>
+          </a:solidFill>
+          <a:ln>
+            <a:noFill/>
+          </a:ln>
+        </p:spPr>
+        <p:txBody>
+          <a:bodyPr rtlCol="0" anchor="ctr" wrap="square" lIns="0" rIns="0" tIns="0" bIns="0"/>
+          <a:lstStyle/>
+          <a:p>
+            <a:pPr algn="ctr"/>
+          </a:p>
+        </p:txBody>
+      </p:sp>
+      <p:sp>
+        <p:nvSpPr>
+          <p:cNvPr id="71" name="TextBox 70"/>
+          <p:cNvSpPr txBox="1"/>
+          <p:nvPr/>
+        </p:nvSpPr>
+        <p:spPr>
+          <a:xfrm>
+            <a:off x="10420184" y="4078224"/>
+            <a:ext cx="960120" cy="201168"/>
+          </a:xfrm>
+          <a:prstGeom prst="rect">
+            <a:avLst/>
+          </a:prstGeom>
+          <a:noFill/>
+        </p:spPr>
+        <p:txBody>
+          <a:bodyPr wrap="square" lIns="0" rIns="0" tIns="0" bIns="0" anchor="t">
+            <a:spAutoFit/>
+          </a:bodyPr>
+          <a:lstStyle/>
+          <a:p>
+            <a:pPr algn="r">
+              <a:spcBef>
+                <a:spcPts val="0"/>
+              </a:spcBef>
+              <a:spcAft>
+                <a:spcPts val="0"/>
+              </a:spcAft>
+            </a:pPr>
+            <a:r>
+              <a:rPr sz="900" b="1">
+                <a:solidFill>
+                  <a:srgbClr val="051C2C"/>
+                </a:solidFill>
+                <a:latin typeface="Segoe UI"/>
+              </a:rPr>
+              <a:t>Production</a:t>
+            </a:r>
+          </a:p>
+        </p:txBody>
+      </p:sp>
+      <p:sp>
+        <p:nvSpPr>
+          <p:cNvPr id="72" name="Rectangle 71"/>
           <p:cNvSpPr/>
           <p:nvPr/>
         </p:nvSpPr>
@@ -25085,7 +25312,7 @@
       </p:sp>
       <p:sp>
         <p:nvSpPr>
-          <p:cNvPr id="71" name="TextBox 70"/>
+          <p:cNvPr id="73" name="TextBox 72"/>
           <p:cNvSpPr txBox="1"/>
           <p:nvPr/>
         </p:nvSpPr>
@@ -25127,7 +25354,7 @@
       </p:sp>
       <p:sp>
         <p:nvSpPr>
-          <p:cNvPr id="72" name="TextBox 71"/>
+          <p:cNvPr id="74" name="TextBox 73"/>
           <p:cNvSpPr txBox="1"/>
           <p:nvPr/>
         </p:nvSpPr>
@@ -25162,14 +25389,14 @@
                 </a:solidFill>
                 <a:latin typeface="Segoe UI"/>
               </a:rPr>
-              <a:t>DPF parallelism, 8 parts remade</a:t>
-            </a:r>
-          </a:p>
-        </p:txBody>
-      </p:sp>
-      <p:sp>
-        <p:nvSpPr>
-          <p:cNvPr id="73" name="Rectangle 72"/>
+              <a:t>PV corrections: 18 DOC, 7 DPF</a:t>
+            </a:r>
+          </a:p>
+        </p:txBody>
+      </p:sp>
+      <p:sp>
+        <p:nvSpPr>
+          <p:cNvPr id="75" name="Rectangle 74"/>
           <p:cNvSpPr/>
           <p:nvPr/>
         </p:nvSpPr>
@@ -25198,7 +25425,7 @@
       </p:sp>
       <p:sp>
         <p:nvSpPr>
-          <p:cNvPr id="74" name="Rectangle 73"/>
+          <p:cNvPr id="76" name="Rectangle 75"/>
           <p:cNvSpPr/>
           <p:nvPr/>
         </p:nvSpPr>
@@ -25229,7 +25456,7 @@
       </p:sp>
       <p:sp>
         <p:nvSpPr>
-          <p:cNvPr id="75" name="TextBox 74"/>
+          <p:cNvPr id="77" name="TextBox 76"/>
           <p:cNvSpPr txBox="1"/>
           <p:nvPr/>
         </p:nvSpPr>
@@ -25271,7 +25498,7 @@
       </p:sp>
       <p:sp>
         <p:nvSpPr>
-          <p:cNvPr id="76" name="TextBox 75"/>
+          <p:cNvPr id="78" name="TextBox 77"/>
           <p:cNvSpPr txBox="1"/>
           <p:nvPr/>
         </p:nvSpPr>
@@ -25306,14 +25533,14 @@
                 </a:solidFill>
                 <a:latin typeface="Segoe UI"/>
               </a:rPr>
-              <a:t>PVs of two models, released</a:t>
-            </a:r>
-          </a:p>
-        </p:txBody>
-      </p:sp>
-      <p:sp>
-        <p:nvSpPr>
-          <p:cNvPr id="77" name="Rectangle 76"/>
+              <a:t>Endout: 7 PVs. Sideout on hold</a:t>
+            </a:r>
+          </a:p>
+        </p:txBody>
+      </p:sp>
+      <p:sp>
+        <p:nvSpPr>
+          <p:cNvPr id="79" name="Rectangle 78"/>
           <p:cNvSpPr/>
           <p:nvPr/>
         </p:nvSpPr>
@@ -25342,7 +25569,7 @@
       </p:sp>
       <p:sp>
         <p:nvSpPr>
-          <p:cNvPr id="78" name="Rectangle 77"/>
+          <p:cNvPr id="80" name="Rectangle 79"/>
           <p:cNvSpPr/>
           <p:nvPr/>
         </p:nvSpPr>
@@ -25371,7 +25598,78 @@
       </p:sp>
       <p:sp>
         <p:nvSpPr>
-          <p:cNvPr id="79" name="Rectangle 78"/>
+          <p:cNvPr id="81" name="Diamond 80"/>
+          <p:cNvSpPr/>
+          <p:nvPr/>
+        </p:nvSpPr>
+        <p:spPr>
+          <a:xfrm>
+            <a:off x="11462600" y="4882896"/>
+            <a:ext cx="201168" cy="201168"/>
+          </a:xfrm>
+          <a:prstGeom prst="diamond">
+            <a:avLst/>
+          </a:prstGeom>
+          <a:solidFill>
+            <a:srgbClr val="FFFFFF"/>
+          </a:solidFill>
+          <a:ln>
+            <a:noFill/>
+          </a:ln>
+        </p:spPr>
+        <p:txBody>
+          <a:bodyPr rtlCol="0" anchor="ctr" wrap="square" lIns="0" rIns="0" tIns="0" bIns="0"/>
+          <a:lstStyle/>
+          <a:p>
+            <a:pPr algn="ctr"/>
+          </a:p>
+        </p:txBody>
+      </p:sp>
+      <p:sp>
+        <p:nvSpPr>
+          <p:cNvPr id="82" name="TextBox 81"/>
+          <p:cNvSpPr txBox="1"/>
+          <p:nvPr/>
+        </p:nvSpPr>
+        <p:spPr>
+          <a:xfrm>
+            <a:off x="10420184" y="4882896"/>
+            <a:ext cx="960120" cy="201168"/>
+          </a:xfrm>
+          <a:prstGeom prst="rect">
+            <a:avLst/>
+          </a:prstGeom>
+          <a:noFill/>
+        </p:spPr>
+        <p:txBody>
+          <a:bodyPr wrap="square" lIns="0" rIns="0" tIns="0" bIns="0" anchor="t">
+            <a:spAutoFit/>
+          </a:bodyPr>
+          <a:lstStyle/>
+          <a:p>
+            <a:pPr algn="r">
+              <a:spcBef>
+                <a:spcPts val="0"/>
+              </a:spcBef>
+              <a:spcAft>
+                <a:spcPts val="0"/>
+              </a:spcAft>
+            </a:pPr>
+            <a:r>
+              <a:rPr sz="900" b="1">
+                <a:solidFill>
+                  <a:srgbClr val="051C2C"/>
+                </a:solidFill>
+                <a:latin typeface="Segoe UI"/>
+              </a:rPr>
+              <a:t>PPAP</a:t>
+            </a:r>
+          </a:p>
+        </p:txBody>
+      </p:sp>
+      <p:sp>
+        <p:nvSpPr>
+          <p:cNvPr id="83" name="Rectangle 82"/>
           <p:cNvSpPr/>
           <p:nvPr/>
         </p:nvSpPr>
@@ -25401,7 +25699,7 @@
       </p:sp>
       <p:sp>
         <p:nvSpPr>
-          <p:cNvPr id="80" name="TextBox 79"/>
+          <p:cNvPr id="84" name="TextBox 83"/>
           <p:cNvSpPr txBox="1"/>
           <p:nvPr/>
         </p:nvSpPr>
@@ -25443,7 +25741,7 @@
       </p:sp>
       <p:sp>
         <p:nvSpPr>
-          <p:cNvPr id="81" name="Rectangle 80"/>
+          <p:cNvPr id="85" name="Rectangle 84"/>
           <p:cNvSpPr/>
           <p:nvPr/>
         </p:nvSpPr>
@@ -25472,7 +25770,7 @@
       </p:sp>
       <p:sp>
         <p:nvSpPr>
-          <p:cNvPr id="82" name="TextBox 81"/>
+          <p:cNvPr id="86" name="TextBox 85"/>
           <p:cNvSpPr txBox="1"/>
           <p:nvPr/>
         </p:nvSpPr>
@@ -25514,7 +25812,7 @@
       </p:sp>
       <p:sp>
         <p:nvSpPr>
-          <p:cNvPr id="83" name="Rectangle 82"/>
+          <p:cNvPr id="87" name="Rectangle 86"/>
           <p:cNvSpPr/>
           <p:nvPr/>
         </p:nvSpPr>
@@ -25543,7 +25841,7 @@
       </p:sp>
       <p:sp>
         <p:nvSpPr>
-          <p:cNvPr id="84" name="TextBox 83"/>
+          <p:cNvPr id="88" name="TextBox 87"/>
           <p:cNvSpPr txBox="1"/>
           <p:nvPr/>
         </p:nvSpPr>
@@ -25585,7 +25883,7 @@
       </p:sp>
       <p:sp>
         <p:nvSpPr>
-          <p:cNvPr id="85" name="Diamond 84"/>
+          <p:cNvPr id="89" name="Diamond 88"/>
           <p:cNvSpPr/>
           <p:nvPr/>
         </p:nvSpPr>
@@ -25614,7 +25912,7 @@
       </p:sp>
       <p:sp>
         <p:nvSpPr>
-          <p:cNvPr id="86" name="TextBox 85"/>
+          <p:cNvPr id="90" name="TextBox 89"/>
           <p:cNvSpPr txBox="1"/>
           <p:nvPr/>
         </p:nvSpPr>
@@ -25656,7 +25954,7 @@
       </p:sp>
       <p:sp>
         <p:nvSpPr>
-          <p:cNvPr id="87" name="Diamond 86"/>
+          <p:cNvPr id="91" name="Diamond 90"/>
           <p:cNvSpPr/>
           <p:nvPr/>
         </p:nvSpPr>
@@ -25685,7 +25983,7 @@
       </p:sp>
       <p:sp>
         <p:nvSpPr>
-          <p:cNvPr id="88" name="TextBox 87"/>
+          <p:cNvPr id="92" name="TextBox 91"/>
           <p:cNvSpPr txBox="1"/>
           <p:nvPr/>
         </p:nvSpPr>
@@ -27897,7 +28195,7 @@
                 </a:solidFill>
                 <a:latin typeface="Segoe UI"/>
               </a:rPr>
-              <a:t>DPF parts that were already released started failing metrology. A metrology expert measured everything again: the main failure was parallelism.</a:t>
+              <a:t>DOC and DPF parts that were already released started failing metrology. A metrology expert measured everything again: the main failure was parallelism.</a:t>
             </a:r>
           </a:p>
           <a:p>
@@ -27919,7 +28217,7 @@
                 </a:solidFill>
                 <a:latin typeface="Segoe UI"/>
               </a:rPr>
-              <a:t>At the same time the SCR model started: bigger, heavier and harder to build, with more machines and processes.</a:t>
+              <a:t>At the same time the SCR model started: bigger, heavier and harder to build. One of its two models, sideout, is on hold for metrology too.</a:t>
             </a:r>
           </a:p>
         </p:txBody>
